--- a/session5/exam-strategy/q4/q4_exam_strategy.pptx
+++ b/session5/exam-strategy/q4/q4_exam_strategy.pptx
@@ -3187,8 +3187,8 @@
         </p:nvSpPr>
         <p:spPr>
           <a:xfrm>
-            <a:off x="274320" y="685800"/>
-            <a:ext cx="6400800" cy="1645920"/>
+            <a:off x="274320" y="640080"/>
+            <a:ext cx="6583680" cy="1280160"/>
           </a:xfrm>
           <a:prstGeom prst="rect">
             <a:avLst/>
@@ -3196,13 +3196,13 @@
           <a:noFill/>
         </p:spPr>
         <p:txBody>
-          <a:bodyPr wrap="square">
+          <a:bodyPr wrap="square" tIns="0" bIns="0">
             <a:spAutoFit/>
           </a:bodyPr>
           <a:lstStyle/>
           <a:p>
             <a:pPr>
-              <a:defRPr sz="1100">
+              <a:defRPr sz="900">
                 <a:solidFill>
                   <a:srgbClr val="FFFFFF"/>
                 </a:solidFill>
@@ -3210,7 +3210,7 @@
               </a:defRPr>
             </a:pPr>
             <a:r>
-              <a:t>An ecommerce company deploys more than 20 services behind Amazon API Gateway. The interaction between services is complex. Each service can potentially call several others, making performance issues and errors difficult to identify. Some individual API calls have experienced slow response times. The development team needs to quickly identify the underlying causes of the slowdowns. Which approach would MOST quickly identify the underlying cause of performance issues?</a:t>
+              <a:t>An ecommerce company deploys more than 20 services behind Amazon API Gateway. The interaction between services is complex. Each service can potentially call several others, making performance issues and errors difficult to identify. Some individual API calls have experienced slow response times. The development team needs to quickly identify the...</a:t>
             </a:r>
           </a:p>
         </p:txBody>
@@ -3223,8 +3223,8 @@
         </p:nvSpPr>
         <p:spPr>
           <a:xfrm>
-            <a:off x="365760" y="2377440"/>
-            <a:ext cx="274320" cy="274320"/>
+            <a:off x="274320" y="2057400"/>
+            <a:ext cx="201168" cy="201168"/>
           </a:xfrm>
           <a:prstGeom prst="ellipse">
             <a:avLst/>
@@ -3255,7 +3255,7 @@
           <a:lstStyle/>
           <a:p>
             <a:pPr algn="ctr">
-              <a:defRPr sz="900" b="1">
+              <a:defRPr sz="700" b="1">
                 <a:solidFill>
                   <a:srgbClr val="FFFFFF"/>
                 </a:solidFill>
@@ -3275,8 +3275,8 @@
         </p:nvSpPr>
         <p:spPr>
           <a:xfrm>
-            <a:off x="777240" y="2377440"/>
-            <a:ext cx="5943600" cy="411480"/>
+            <a:off x="548640" y="2011680"/>
+            <a:ext cx="6400800" cy="736092"/>
           </a:xfrm>
           <a:prstGeom prst="rect">
             <a:avLst/>
@@ -3284,13 +3284,13 @@
           <a:noFill/>
         </p:spPr>
         <p:txBody>
-          <a:bodyPr wrap="square">
+          <a:bodyPr wrap="square" tIns="25400" bIns="0" lIns="0">
             <a:spAutoFit/>
           </a:bodyPr>
           <a:lstStyle/>
           <a:p>
             <a:pPr>
-              <a:defRPr sz="1000">
+              <a:defRPr sz="800">
                 <a:solidFill>
                   <a:srgbClr val="CCCCCC"/>
                 </a:solidFill>
@@ -3298,7 +3298,7 @@
               </a:defRPr>
             </a:pPr>
             <a:r>
-              <a:t>It is time consuming to examine and compare metric values of various services. The number of CPU or network calls a serv</a:t>
+              <a:t>It is time consuming to examine and compare metric values of various services. The number of CPU or </a:t>
             </a:r>
           </a:p>
         </p:txBody>
@@ -3311,8 +3311,8 @@
         </p:nvSpPr>
         <p:spPr>
           <a:xfrm>
-            <a:off x="365760" y="2834640"/>
-            <a:ext cx="274320" cy="274320"/>
+            <a:off x="274320" y="2811780"/>
+            <a:ext cx="201168" cy="201168"/>
           </a:xfrm>
           <a:prstGeom prst="ellipse">
             <a:avLst/>
@@ -3343,7 +3343,7 @@
           <a:lstStyle/>
           <a:p>
             <a:pPr algn="ctr">
-              <a:defRPr sz="900" b="1">
+              <a:defRPr sz="700" b="1">
                 <a:solidFill>
                   <a:srgbClr val="FFFFFF"/>
                 </a:solidFill>
@@ -3363,8 +3363,8 @@
         </p:nvSpPr>
         <p:spPr>
           <a:xfrm>
-            <a:off x="777240" y="2834640"/>
-            <a:ext cx="5943600" cy="411480"/>
+            <a:off x="548640" y="2766060"/>
+            <a:ext cx="6400800" cy="736092"/>
           </a:xfrm>
           <a:prstGeom prst="rect">
             <a:avLst/>
@@ -3372,13 +3372,13 @@
           <a:noFill/>
         </p:spPr>
         <p:txBody>
-          <a:bodyPr wrap="square">
+          <a:bodyPr wrap="square" tIns="25400" bIns="0" lIns="0">
             <a:spAutoFit/>
           </a:bodyPr>
           <a:lstStyle/>
           <a:p>
             <a:pPr>
-              <a:defRPr sz="1000">
+              <a:defRPr sz="800">
                 <a:solidFill>
                   <a:srgbClr val="CCCCCC"/>
                 </a:solidFill>
@@ -3386,7 +3386,7 @@
               </a:defRPr>
             </a:pPr>
             <a:r>
-              <a:t>Not all services send logs to CloudWatch Logs. It is time consuming to examine a large numbers of different log files. L</a:t>
+              <a:t>Not all services send logs to CloudWatch Logs. It is time consuming to examine a large numbers of di</a:t>
             </a:r>
           </a:p>
         </p:txBody>
@@ -3399,8 +3399,8 @@
         </p:nvSpPr>
         <p:spPr>
           <a:xfrm>
-            <a:off x="365760" y="3291840"/>
-            <a:ext cx="274320" cy="274320"/>
+            <a:off x="274320" y="3566160"/>
+            <a:ext cx="201168" cy="201168"/>
           </a:xfrm>
           <a:prstGeom prst="ellipse">
             <a:avLst/>
@@ -3431,7 +3431,7 @@
           <a:lstStyle/>
           <a:p>
             <a:pPr algn="ctr">
-              <a:defRPr sz="900" b="1">
+              <a:defRPr sz="700" b="1">
                 <a:solidFill>
                   <a:srgbClr val="FFFFFF"/>
                 </a:solidFill>
@@ -3451,8 +3451,8 @@
         </p:nvSpPr>
         <p:spPr>
           <a:xfrm>
-            <a:off x="777240" y="3291840"/>
-            <a:ext cx="5943600" cy="411480"/>
+            <a:off x="548640" y="3520440"/>
+            <a:ext cx="6400800" cy="736092"/>
           </a:xfrm>
           <a:prstGeom prst="rect">
             <a:avLst/>
@@ -3460,13 +3460,13 @@
           <a:noFill/>
         </p:spPr>
         <p:txBody>
-          <a:bodyPr wrap="square">
+          <a:bodyPr wrap="square" tIns="25400" bIns="0" lIns="0">
             <a:spAutoFit/>
           </a:bodyPr>
           <a:lstStyle/>
           <a:p>
             <a:pPr>
-              <a:defRPr sz="1000">
+              <a:defRPr sz="800">
                 <a:solidFill>
                   <a:srgbClr val="CCCCCC"/>
                 </a:solidFill>
@@ -3474,7 +3474,7 @@
               </a:defRPr>
             </a:pPr>
             <a:r>
-              <a:t>Unlike metrics or logs, X-Ray can help users quickly identify services by their relative response times. X-Ray can ident</a:t>
+              <a:t>Unlike metrics or logs, X-Ray can help users quickly identify services by their relative response ti</a:t>
             </a:r>
           </a:p>
         </p:txBody>
@@ -3487,8 +3487,8 @@
         </p:nvSpPr>
         <p:spPr>
           <a:xfrm>
-            <a:off x="365760" y="3749039"/>
-            <a:ext cx="274320" cy="274320"/>
+            <a:off x="274320" y="4320540"/>
+            <a:ext cx="201168" cy="201168"/>
           </a:xfrm>
           <a:prstGeom prst="ellipse">
             <a:avLst/>
@@ -3519,7 +3519,7 @@
           <a:lstStyle/>
           <a:p>
             <a:pPr algn="ctr">
-              <a:defRPr sz="900" b="1">
+              <a:defRPr sz="700" b="1">
                 <a:solidFill>
                   <a:srgbClr val="FFFFFF"/>
                 </a:solidFill>
@@ -3539,8 +3539,8 @@
         </p:nvSpPr>
         <p:spPr>
           <a:xfrm>
-            <a:off x="777240" y="3749039"/>
-            <a:ext cx="5943600" cy="411480"/>
+            <a:off x="548640" y="4274820"/>
+            <a:ext cx="6400800" cy="736092"/>
           </a:xfrm>
           <a:prstGeom prst="rect">
             <a:avLst/>
@@ -3548,13 +3548,13 @@
           <a:noFill/>
         </p:spPr>
         <p:txBody>
-          <a:bodyPr wrap="square">
+          <a:bodyPr wrap="square" tIns="25400" bIns="0" lIns="0">
             <a:spAutoFit/>
           </a:bodyPr>
           <a:lstStyle/>
           <a:p>
             <a:pPr>
-              <a:defRPr sz="1000">
+              <a:defRPr sz="800">
                 <a:solidFill>
                   <a:srgbClr val="CCCCCC"/>
                 </a:solidFill>
@@ -3562,7 +3562,7 @@
               </a:defRPr>
             </a:pPr>
             <a:r>
-              <a:t>CloudTrail records API calls. CloudTrail is not an application log aggregator, such as CloudWatch Logs. Any API calls th</a:t>
+              <a:t>CloudTrail records API calls. CloudTrail is not an application log aggregator, such as CloudWatch Lo</a:t>
             </a:r>
           </a:p>
         </p:txBody>
@@ -3844,8 +3844,8 @@
         </p:blipFill>
         <p:spPr>
           <a:xfrm>
-            <a:off x="182880" y="914400"/>
-            <a:ext cx="5280660" cy="3840480"/>
+            <a:off x="182880" y="1214709"/>
+            <a:ext cx="5303520" cy="3239860"/>
           </a:xfrm>
           <a:prstGeom prst="rect">
             <a:avLst/>
@@ -3980,9 +3980,9 @@
           <a:p>
             <a:pPr>
               <a:spcAft>
-                <a:spcPts val="600"/>
+                <a:spcPts val="400"/>
               </a:spcAft>
-              <a:defRPr sz="900">
+              <a:defRPr sz="800">
                 <a:solidFill>
                   <a:srgbClr val="212121"/>
                 </a:solidFill>
@@ -3990,15 +3990,15 @@
               </a:defRPr>
             </a:pPr>
             <a:r>
-              <a:t>• It is time consuming to examine and compare metric values of various services.</a:t>
+              <a:t>• It is time consuming to examine and compare metric values of various services</a:t>
             </a:r>
           </a:p>
           <a:p>
             <a:pPr>
               <a:spcAft>
-                <a:spcPts val="600"/>
+                <a:spcPts val="400"/>
               </a:spcAft>
-              <a:defRPr sz="900">
+              <a:defRPr sz="800">
                 <a:solidFill>
                   <a:srgbClr val="212121"/>
                 </a:solidFill>
@@ -4006,15 +4006,15 @@
               </a:defRPr>
             </a:pPr>
             <a:r>
-              <a:t>• The number of CPU or network calls a service makes indicates relative work load.</a:t>
+              <a:t>• The number of CPU or network calls a service makes indicates relative work load</a:t>
             </a:r>
           </a:p>
           <a:p>
             <a:pPr>
               <a:spcAft>
-                <a:spcPts val="600"/>
+                <a:spcPts val="400"/>
               </a:spcAft>
-              <a:defRPr sz="900">
+              <a:defRPr sz="800">
                 <a:solidFill>
                   <a:srgbClr val="212121"/>
                 </a:solidFill>
@@ -4022,15 +4022,15 @@
               </a:defRPr>
             </a:pPr>
             <a:r>
-              <a:t>• The number of these CPU or network calls does not indicate poor performance.</a:t>
+              <a:t>• The number of these CPU or network calls does not indicate poor performance</a:t>
             </a:r>
           </a:p>
           <a:p>
             <a:pPr>
               <a:spcAft>
-                <a:spcPts val="600"/>
+                <a:spcPts val="400"/>
               </a:spcAft>
-              <a:defRPr sz="900">
+              <a:defRPr sz="800">
                 <a:solidFill>
                   <a:srgbClr val="212121"/>
                 </a:solidFill>
@@ -4038,15 +4038,15 @@
               </a:defRPr>
             </a:pPr>
             <a:r>
-              <a:t>• X-Ray is mainly used to study a service's interaction time with other services.</a:t>
+              <a:t>• X-Ray is mainly used to study a service's interaction time with other services</a:t>
             </a:r>
           </a:p>
           <a:p>
             <a:pPr>
               <a:spcAft>
-                <a:spcPts val="600"/>
+                <a:spcPts val="400"/>
               </a:spcAft>
-              <a:defRPr sz="900">
+              <a:defRPr sz="800">
                 <a:solidFill>
                   <a:srgbClr val="212121"/>
                 </a:solidFill>
@@ -4054,7 +4054,39 @@
               </a:defRPr>
             </a:pPr>
             <a:r>
-              <a:t>• It has limited utility to diagnose an individual service's performance.</a:t>
+              <a:t>• It has limited utility to diagnose an individual service's performance</a:t>
+            </a:r>
+          </a:p>
+          <a:p>
+            <a:pPr>
+              <a:spcAft>
+                <a:spcPts val="400"/>
+              </a:spcAft>
+              <a:defRPr sz="800">
+                <a:solidFill>
+                  <a:srgbClr val="212121"/>
+                </a:solidFill>
+                <a:latin typeface="Segoe UI"/>
+              </a:defRPr>
+            </a:pPr>
+            <a:r>
+              <a:t>• However, X-Ray is excellent at quickly finding poorly performing services within a web of interaction</a:t>
+            </a:r>
+          </a:p>
+          <a:p>
+            <a:pPr>
+              <a:spcAft>
+                <a:spcPts val="400"/>
+              </a:spcAft>
+              <a:defRPr sz="800">
+                <a:solidFill>
+                  <a:srgbClr val="212121"/>
+                </a:solidFill>
+                <a:latin typeface="Segoe UI"/>
+              </a:defRPr>
+            </a:pPr>
+            <a:r>
+              <a:t>• CloudWatch metrics and logs can be used to study the targeted services</a:t>
             </a:r>
           </a:p>
         </p:txBody>
@@ -4233,8 +4265,8 @@
         </p:blipFill>
         <p:spPr>
           <a:xfrm>
-            <a:off x="182880" y="1466854"/>
-            <a:ext cx="5303520" cy="2735570"/>
+            <a:off x="182880" y="1195018"/>
+            <a:ext cx="5303520" cy="3279242"/>
           </a:xfrm>
           <a:prstGeom prst="rect">
             <a:avLst/>
@@ -4369,9 +4401,9 @@
           <a:p>
             <a:pPr>
               <a:spcAft>
-                <a:spcPts val="600"/>
+                <a:spcPts val="400"/>
               </a:spcAft>
-              <a:defRPr sz="900">
+              <a:defRPr sz="800">
                 <a:solidFill>
                   <a:srgbClr val="212121"/>
                 </a:solidFill>
@@ -4379,15 +4411,15 @@
               </a:defRPr>
             </a:pPr>
             <a:r>
-              <a:t>• Not all services send logs to CloudWatch Logs.</a:t>
+              <a:t>• Not all services send logs to CloudWatch Logs</a:t>
             </a:r>
           </a:p>
           <a:p>
             <a:pPr>
               <a:spcAft>
-                <a:spcPts val="600"/>
+                <a:spcPts val="400"/>
               </a:spcAft>
-              <a:defRPr sz="900">
+              <a:defRPr sz="800">
                 <a:solidFill>
                   <a:srgbClr val="212121"/>
                 </a:solidFill>
@@ -4395,15 +4427,15 @@
               </a:defRPr>
             </a:pPr>
             <a:r>
-              <a:t>• It is time consuming to examine a large numbers of different log files.</a:t>
+              <a:t>• It is time consuming to examine a large numbers of different log files</a:t>
             </a:r>
           </a:p>
           <a:p>
             <a:pPr>
               <a:spcAft>
-                <a:spcPts val="600"/>
+                <a:spcPts val="400"/>
               </a:spcAft>
-              <a:defRPr sz="900">
+              <a:defRPr sz="800">
                 <a:solidFill>
                   <a:srgbClr val="212121"/>
                 </a:solidFill>
@@ -4411,15 +4443,15 @@
               </a:defRPr>
             </a:pPr>
             <a:r>
-              <a:t>• Log output is application-specific and may not provide any insight into performance issues.</a:t>
+              <a:t>• Log output is application-specific and may not provide any insight into performance issues</a:t>
             </a:r>
           </a:p>
           <a:p>
             <a:pPr>
               <a:spcAft>
-                <a:spcPts val="600"/>
+                <a:spcPts val="400"/>
               </a:spcAft>
-              <a:defRPr sz="900">
+              <a:defRPr sz="800">
                 <a:solidFill>
                   <a:srgbClr val="212121"/>
                 </a:solidFill>
@@ -4427,7 +4459,7 @@
               </a:defRPr>
             </a:pPr>
             <a:r>
-              <a:t>• CloudTrail records API calls, not application-level activity.</a:t>
+              <a:t>• CloudTrail records API calls, not application-level activity</a:t>
             </a:r>
           </a:p>
         </p:txBody>
@@ -4607,7 +4639,7 @@
         <p:spPr>
           <a:xfrm>
             <a:off x="182880" y="914400"/>
-            <a:ext cx="5280660" cy="3840480"/>
+            <a:ext cx="2225976" cy="3840480"/>
           </a:xfrm>
           <a:prstGeom prst="rect">
             <a:avLst/>
@@ -4742,9 +4774,9 @@
           <a:p>
             <a:pPr>
               <a:spcAft>
-                <a:spcPts val="600"/>
+                <a:spcPts val="400"/>
               </a:spcAft>
-              <a:defRPr sz="900">
+              <a:defRPr sz="800">
                 <a:solidFill>
                   <a:srgbClr val="212121"/>
                 </a:solidFill>
@@ -4752,15 +4784,15 @@
               </a:defRPr>
             </a:pPr>
             <a:r>
-              <a:t>• Unlike metrics or logs, X-Ray can help users quickly identify services by their relative response times.</a:t>
+              <a:t>• Unlike metrics or logs</a:t>
             </a:r>
           </a:p>
           <a:p>
             <a:pPr>
               <a:spcAft>
-                <a:spcPts val="600"/>
+                <a:spcPts val="400"/>
               </a:spcAft>
-              <a:defRPr sz="900">
+              <a:defRPr sz="800">
                 <a:solidFill>
                   <a:srgbClr val="212121"/>
                 </a:solidFill>
@@ -4768,15 +4800,15 @@
               </a:defRPr>
             </a:pPr>
             <a:r>
-              <a:t>• X-Ray can identify a poorly performing service from within a web of interacting services.</a:t>
+              <a:t>• X-Ray can help users quickly identify services by their relative response times</a:t>
             </a:r>
           </a:p>
           <a:p>
             <a:pPr>
               <a:spcAft>
-                <a:spcPts val="600"/>
+                <a:spcPts val="400"/>
               </a:spcAft>
-              <a:defRPr sz="900">
+              <a:defRPr sz="800">
                 <a:solidFill>
                   <a:srgbClr val="212121"/>
                 </a:solidFill>
@@ -4784,7 +4816,23 @@
               </a:defRPr>
             </a:pPr>
             <a:r>
-              <a:t>• Once identified, CloudWatch provides the context, including the logs and metrics necessary to study specific issues.</a:t>
+              <a:t>• X-Ray can identify a poorly performing service from within a web of interacting services</a:t>
+            </a:r>
+          </a:p>
+          <a:p>
+            <a:pPr>
+              <a:spcAft>
+                <a:spcPts val="400"/>
+              </a:spcAft>
+              <a:defRPr sz="800">
+                <a:solidFill>
+                  <a:srgbClr val="212121"/>
+                </a:solidFill>
+                <a:latin typeface="Segoe UI"/>
+              </a:defRPr>
+            </a:pPr>
+            <a:r>
+              <a:t>• Once identified, CloudWatch provides the context, including the logs and metrics necessary to study specific issues</a:t>
             </a:r>
           </a:p>
         </p:txBody>
@@ -4963,8 +5011,8 @@
         </p:blipFill>
         <p:spPr>
           <a:xfrm>
-            <a:off x="182880" y="1776011"/>
-            <a:ext cx="5303520" cy="2117256"/>
+            <a:off x="182880" y="1212111"/>
+            <a:ext cx="5303520" cy="3245056"/>
           </a:xfrm>
           <a:prstGeom prst="rect">
             <a:avLst/>
@@ -5099,9 +5147,9 @@
           <a:p>
             <a:pPr>
               <a:spcAft>
-                <a:spcPts val="600"/>
+                <a:spcPts val="400"/>
               </a:spcAft>
-              <a:defRPr sz="900">
+              <a:defRPr sz="800">
                 <a:solidFill>
                   <a:srgbClr val="212121"/>
                 </a:solidFill>
@@ -5109,15 +5157,15 @@
               </a:defRPr>
             </a:pPr>
             <a:r>
-              <a:t>• CloudTrail records API calls.</a:t>
+              <a:t>• CloudTrail records API calls</a:t>
             </a:r>
           </a:p>
           <a:p>
             <a:pPr>
               <a:spcAft>
-                <a:spcPts val="600"/>
+                <a:spcPts val="400"/>
               </a:spcAft>
-              <a:defRPr sz="900">
+              <a:defRPr sz="800">
                 <a:solidFill>
                   <a:srgbClr val="212121"/>
                 </a:solidFill>
@@ -5125,15 +5173,15 @@
               </a:defRPr>
             </a:pPr>
             <a:r>
-              <a:t>• CloudTrail is not an application log aggregator, such as CloudWatch Logs.</a:t>
+              <a:t>• CloudTrail is not an application log aggregator, such as CloudWatch Logs</a:t>
             </a:r>
           </a:p>
           <a:p>
             <a:pPr>
               <a:spcAft>
-                <a:spcPts val="600"/>
+                <a:spcPts val="400"/>
               </a:spcAft>
-              <a:defRPr sz="900">
+              <a:defRPr sz="800">
                 <a:solidFill>
                   <a:srgbClr val="212121"/>
                 </a:solidFill>
@@ -5141,15 +5189,15 @@
               </a:defRPr>
             </a:pPr>
             <a:r>
-              <a:t>• Any API calls that individual services make would be not be likely to affect application performance.</a:t>
+              <a:t>• Any API calls that individual services make would be not be likely to affect application performance</a:t>
             </a:r>
           </a:p>
           <a:p>
             <a:pPr>
               <a:spcAft>
-                <a:spcPts val="600"/>
+                <a:spcPts val="400"/>
               </a:spcAft>
-              <a:defRPr sz="900">
+              <a:defRPr sz="800">
                 <a:solidFill>
                   <a:srgbClr val="212121"/>
                 </a:solidFill>
@@ -5157,15 +5205,15 @@
               </a:defRPr>
             </a:pPr>
             <a:r>
-              <a:t>• Also, X-Ray is mainly used to study a service's interaction time with other services.</a:t>
+              <a:t>• Also, X-Ray is mainly used to study a service's interaction time with other services</a:t>
             </a:r>
           </a:p>
           <a:p>
             <a:pPr>
               <a:spcAft>
-                <a:spcPts val="600"/>
+                <a:spcPts val="400"/>
               </a:spcAft>
-              <a:defRPr sz="900">
+              <a:defRPr sz="800">
                 <a:solidFill>
                   <a:srgbClr val="212121"/>
                 </a:solidFill>
@@ -5173,7 +5221,7 @@
               </a:defRPr>
             </a:pPr>
             <a:r>
-              <a:t>• It has limited utility to diagnose an individual service's performance.</a:t>
+              <a:t>• It has limited utility to diagnose an individual service's performance</a:t>
             </a:r>
           </a:p>
         </p:txBody>

--- a/session5/exam-strategy/q4/q4_exam_strategy.pptx
+++ b/session5/exam-strategy/q4/q4_exam_strategy.pptx
@@ -3187,8 +3187,8 @@
         </p:nvSpPr>
         <p:spPr>
           <a:xfrm>
-            <a:off x="274320" y="640080"/>
-            <a:ext cx="6583680" cy="1280160"/>
+            <a:off x="274320" y="685800"/>
+            <a:ext cx="6400800" cy="1645920"/>
           </a:xfrm>
           <a:prstGeom prst="rect">
             <a:avLst/>
@@ -3196,13 +3196,13 @@
           <a:noFill/>
         </p:spPr>
         <p:txBody>
-          <a:bodyPr wrap="square" tIns="0" bIns="0">
+          <a:bodyPr wrap="square">
             <a:spAutoFit/>
           </a:bodyPr>
           <a:lstStyle/>
           <a:p>
             <a:pPr>
-              <a:defRPr sz="900">
+              <a:defRPr sz="1100">
                 <a:solidFill>
                   <a:srgbClr val="FFFFFF"/>
                 </a:solidFill>
@@ -3210,7 +3210,7 @@
               </a:defRPr>
             </a:pPr>
             <a:r>
-              <a:t>An ecommerce company deploys more than 20 services behind Amazon API Gateway. The interaction between services is complex. Each service can potentially call several others, making performance issues and errors difficult to identify. Some individual API calls have experienced slow response times. The development team needs to quickly identify the...</a:t>
+              <a:t>An ecommerce company deploys more than 20 services behind Amazon API Gateway. The interaction between services is complex. Each service can potentially call several others, making performance issues and errors difficult to identify. Some individual API calls have experienced slow response times. The development team needs to quickly identify the underlying causes of the slowdowns. Which approach would MOST quickly identify the underlying cause of performance issues?</a:t>
             </a:r>
           </a:p>
         </p:txBody>
@@ -3223,8 +3223,8 @@
         </p:nvSpPr>
         <p:spPr>
           <a:xfrm>
-            <a:off x="274320" y="2057400"/>
-            <a:ext cx="201168" cy="201168"/>
+            <a:off x="365760" y="2377440"/>
+            <a:ext cx="274320" cy="274320"/>
           </a:xfrm>
           <a:prstGeom prst="ellipse">
             <a:avLst/>
@@ -3255,7 +3255,7 @@
           <a:lstStyle/>
           <a:p>
             <a:pPr algn="ctr">
-              <a:defRPr sz="700" b="1">
+              <a:defRPr sz="900" b="1">
                 <a:solidFill>
                   <a:srgbClr val="FFFFFF"/>
                 </a:solidFill>
@@ -3275,8 +3275,8 @@
         </p:nvSpPr>
         <p:spPr>
           <a:xfrm>
-            <a:off x="548640" y="2011680"/>
-            <a:ext cx="6400800" cy="736092"/>
+            <a:off x="777240" y="2377440"/>
+            <a:ext cx="5943600" cy="411480"/>
           </a:xfrm>
           <a:prstGeom prst="rect">
             <a:avLst/>
@@ -3284,13 +3284,13 @@
           <a:noFill/>
         </p:spPr>
         <p:txBody>
-          <a:bodyPr wrap="square" tIns="25400" bIns="0" lIns="0">
+          <a:bodyPr wrap="square">
             <a:spAutoFit/>
           </a:bodyPr>
           <a:lstStyle/>
           <a:p>
             <a:pPr>
-              <a:defRPr sz="800">
+              <a:defRPr sz="1000">
                 <a:solidFill>
                   <a:srgbClr val="CCCCCC"/>
                 </a:solidFill>
@@ -3298,7 +3298,7 @@
               </a:defRPr>
             </a:pPr>
             <a:r>
-              <a:t>It is time consuming to examine and compare metric values of various services. The number of CPU or </a:t>
+              <a:t>It is time consuming to examine and compare metric values of various services. The number of CPU or network calls a serv</a:t>
             </a:r>
           </a:p>
         </p:txBody>
@@ -3311,8 +3311,8 @@
         </p:nvSpPr>
         <p:spPr>
           <a:xfrm>
-            <a:off x="274320" y="2811780"/>
-            <a:ext cx="201168" cy="201168"/>
+            <a:off x="365760" y="2834640"/>
+            <a:ext cx="274320" cy="274320"/>
           </a:xfrm>
           <a:prstGeom prst="ellipse">
             <a:avLst/>
@@ -3343,7 +3343,7 @@
           <a:lstStyle/>
           <a:p>
             <a:pPr algn="ctr">
-              <a:defRPr sz="700" b="1">
+              <a:defRPr sz="900" b="1">
                 <a:solidFill>
                   <a:srgbClr val="FFFFFF"/>
                 </a:solidFill>
@@ -3363,8 +3363,8 @@
         </p:nvSpPr>
         <p:spPr>
           <a:xfrm>
-            <a:off x="548640" y="2766060"/>
-            <a:ext cx="6400800" cy="736092"/>
+            <a:off x="777240" y="2834640"/>
+            <a:ext cx="5943600" cy="411480"/>
           </a:xfrm>
           <a:prstGeom prst="rect">
             <a:avLst/>
@@ -3372,13 +3372,13 @@
           <a:noFill/>
         </p:spPr>
         <p:txBody>
-          <a:bodyPr wrap="square" tIns="25400" bIns="0" lIns="0">
+          <a:bodyPr wrap="square">
             <a:spAutoFit/>
           </a:bodyPr>
           <a:lstStyle/>
           <a:p>
             <a:pPr>
-              <a:defRPr sz="800">
+              <a:defRPr sz="1000">
                 <a:solidFill>
                   <a:srgbClr val="CCCCCC"/>
                 </a:solidFill>
@@ -3386,7 +3386,7 @@
               </a:defRPr>
             </a:pPr>
             <a:r>
-              <a:t>Not all services send logs to CloudWatch Logs. It is time consuming to examine a large numbers of di</a:t>
+              <a:t>Not all services send logs to CloudWatch Logs. It is time consuming to examine a large numbers of different log files. L</a:t>
             </a:r>
           </a:p>
         </p:txBody>
@@ -3399,8 +3399,8 @@
         </p:nvSpPr>
         <p:spPr>
           <a:xfrm>
-            <a:off x="274320" y="3566160"/>
-            <a:ext cx="201168" cy="201168"/>
+            <a:off x="365760" y="3291840"/>
+            <a:ext cx="274320" cy="274320"/>
           </a:xfrm>
           <a:prstGeom prst="ellipse">
             <a:avLst/>
@@ -3431,7 +3431,7 @@
           <a:lstStyle/>
           <a:p>
             <a:pPr algn="ctr">
-              <a:defRPr sz="700" b="1">
+              <a:defRPr sz="900" b="1">
                 <a:solidFill>
                   <a:srgbClr val="FFFFFF"/>
                 </a:solidFill>
@@ -3451,8 +3451,8 @@
         </p:nvSpPr>
         <p:spPr>
           <a:xfrm>
-            <a:off x="548640" y="3520440"/>
-            <a:ext cx="6400800" cy="736092"/>
+            <a:off x="777240" y="3291840"/>
+            <a:ext cx="5943600" cy="411480"/>
           </a:xfrm>
           <a:prstGeom prst="rect">
             <a:avLst/>
@@ -3460,13 +3460,13 @@
           <a:noFill/>
         </p:spPr>
         <p:txBody>
-          <a:bodyPr wrap="square" tIns="25400" bIns="0" lIns="0">
+          <a:bodyPr wrap="square">
             <a:spAutoFit/>
           </a:bodyPr>
           <a:lstStyle/>
           <a:p>
             <a:pPr>
-              <a:defRPr sz="800">
+              <a:defRPr sz="1000">
                 <a:solidFill>
                   <a:srgbClr val="CCCCCC"/>
                 </a:solidFill>
@@ -3474,7 +3474,7 @@
               </a:defRPr>
             </a:pPr>
             <a:r>
-              <a:t>Unlike metrics or logs, X-Ray can help users quickly identify services by their relative response ti</a:t>
+              <a:t>Unlike metrics or logs, X-Ray can help users quickly identify services by their relative response times. X-Ray can ident</a:t>
             </a:r>
           </a:p>
         </p:txBody>
@@ -3487,8 +3487,8 @@
         </p:nvSpPr>
         <p:spPr>
           <a:xfrm>
-            <a:off x="274320" y="4320540"/>
-            <a:ext cx="201168" cy="201168"/>
+            <a:off x="365760" y="3749039"/>
+            <a:ext cx="274320" cy="274320"/>
           </a:xfrm>
           <a:prstGeom prst="ellipse">
             <a:avLst/>
@@ -3519,7 +3519,7 @@
           <a:lstStyle/>
           <a:p>
             <a:pPr algn="ctr">
-              <a:defRPr sz="700" b="1">
+              <a:defRPr sz="900" b="1">
                 <a:solidFill>
                   <a:srgbClr val="FFFFFF"/>
                 </a:solidFill>
@@ -3539,8 +3539,8 @@
         </p:nvSpPr>
         <p:spPr>
           <a:xfrm>
-            <a:off x="548640" y="4274820"/>
-            <a:ext cx="6400800" cy="736092"/>
+            <a:off x="777240" y="3749039"/>
+            <a:ext cx="5943600" cy="411480"/>
           </a:xfrm>
           <a:prstGeom prst="rect">
             <a:avLst/>
@@ -3548,13 +3548,13 @@
           <a:noFill/>
         </p:spPr>
         <p:txBody>
-          <a:bodyPr wrap="square" tIns="25400" bIns="0" lIns="0">
+          <a:bodyPr wrap="square">
             <a:spAutoFit/>
           </a:bodyPr>
           <a:lstStyle/>
           <a:p>
             <a:pPr>
-              <a:defRPr sz="800">
+              <a:defRPr sz="1000">
                 <a:solidFill>
                   <a:srgbClr val="CCCCCC"/>
                 </a:solidFill>
@@ -3562,7 +3562,7 @@
               </a:defRPr>
             </a:pPr>
             <a:r>
-              <a:t>CloudTrail records API calls. CloudTrail is not an application log aggregator, such as CloudWatch Lo</a:t>
+              <a:t>CloudTrail records API calls. CloudTrail is not an application log aggregator, such as CloudWatch Logs. Any API calls th</a:t>
             </a:r>
           </a:p>
         </p:txBody>
@@ -3844,8 +3844,8 @@
         </p:blipFill>
         <p:spPr>
           <a:xfrm>
-            <a:off x="182880" y="1214709"/>
-            <a:ext cx="5303520" cy="3239860"/>
+            <a:off x="182880" y="914400"/>
+            <a:ext cx="2973458" cy="3840480"/>
           </a:xfrm>
           <a:prstGeom prst="rect">
             <a:avLst/>
@@ -3980,9 +3980,9 @@
           <a:p>
             <a:pPr>
               <a:spcAft>
-                <a:spcPts val="400"/>
+                <a:spcPts val="600"/>
               </a:spcAft>
-              <a:defRPr sz="800">
+              <a:defRPr sz="900">
                 <a:solidFill>
                   <a:srgbClr val="212121"/>
                 </a:solidFill>
@@ -3990,15 +3990,15 @@
               </a:defRPr>
             </a:pPr>
             <a:r>
-              <a:t>• It is time consuming to examine and compare metric values of various services</a:t>
+              <a:t>• It is time consuming to examine and compare metric values of various services.</a:t>
             </a:r>
           </a:p>
           <a:p>
             <a:pPr>
               <a:spcAft>
-                <a:spcPts val="400"/>
+                <a:spcPts val="600"/>
               </a:spcAft>
-              <a:defRPr sz="800">
+              <a:defRPr sz="900">
                 <a:solidFill>
                   <a:srgbClr val="212121"/>
                 </a:solidFill>
@@ -4006,15 +4006,15 @@
               </a:defRPr>
             </a:pPr>
             <a:r>
-              <a:t>• The number of CPU or network calls a service makes indicates relative work load</a:t>
+              <a:t>• The number of CPU or network calls a service makes indicates relative work load.</a:t>
             </a:r>
           </a:p>
           <a:p>
             <a:pPr>
               <a:spcAft>
-                <a:spcPts val="400"/>
+                <a:spcPts val="600"/>
               </a:spcAft>
-              <a:defRPr sz="800">
+              <a:defRPr sz="900">
                 <a:solidFill>
                   <a:srgbClr val="212121"/>
                 </a:solidFill>
@@ -4022,15 +4022,15 @@
               </a:defRPr>
             </a:pPr>
             <a:r>
-              <a:t>• The number of these CPU or network calls does not indicate poor performance</a:t>
+              <a:t>• The number of these CPU or network calls does not indicate poor performance.</a:t>
             </a:r>
           </a:p>
           <a:p>
             <a:pPr>
               <a:spcAft>
-                <a:spcPts val="400"/>
+                <a:spcPts val="600"/>
               </a:spcAft>
-              <a:defRPr sz="800">
+              <a:defRPr sz="900">
                 <a:solidFill>
                   <a:srgbClr val="212121"/>
                 </a:solidFill>
@@ -4038,15 +4038,15 @@
               </a:defRPr>
             </a:pPr>
             <a:r>
-              <a:t>• X-Ray is mainly used to study a service's interaction time with other services</a:t>
+              <a:t>• X-Ray is mainly used to study a service's interaction time with other services.</a:t>
             </a:r>
           </a:p>
           <a:p>
             <a:pPr>
               <a:spcAft>
-                <a:spcPts val="400"/>
+                <a:spcPts val="600"/>
               </a:spcAft>
-              <a:defRPr sz="800">
+              <a:defRPr sz="900">
                 <a:solidFill>
                   <a:srgbClr val="212121"/>
                 </a:solidFill>
@@ -4054,39 +4054,7 @@
               </a:defRPr>
             </a:pPr>
             <a:r>
-              <a:t>• It has limited utility to diagnose an individual service's performance</a:t>
-            </a:r>
-          </a:p>
-          <a:p>
-            <a:pPr>
-              <a:spcAft>
-                <a:spcPts val="400"/>
-              </a:spcAft>
-              <a:defRPr sz="800">
-                <a:solidFill>
-                  <a:srgbClr val="212121"/>
-                </a:solidFill>
-                <a:latin typeface="Segoe UI"/>
-              </a:defRPr>
-            </a:pPr>
-            <a:r>
-              <a:t>• However, X-Ray is excellent at quickly finding poorly performing services within a web of interaction</a:t>
-            </a:r>
-          </a:p>
-          <a:p>
-            <a:pPr>
-              <a:spcAft>
-                <a:spcPts val="400"/>
-              </a:spcAft>
-              <a:defRPr sz="800">
-                <a:solidFill>
-                  <a:srgbClr val="212121"/>
-                </a:solidFill>
-                <a:latin typeface="Segoe UI"/>
-              </a:defRPr>
-            </a:pPr>
-            <a:r>
-              <a:t>• CloudWatch metrics and logs can be used to study the targeted services</a:t>
+              <a:t>• It has limited utility to diagnose an individual service's performance.</a:t>
             </a:r>
           </a:p>
         </p:txBody>
@@ -4265,8 +4233,8 @@
         </p:blipFill>
         <p:spPr>
           <a:xfrm>
-            <a:off x="182880" y="1195018"/>
-            <a:ext cx="5303520" cy="3279242"/>
+            <a:off x="182880" y="914400"/>
+            <a:ext cx="3594295" cy="3840480"/>
           </a:xfrm>
           <a:prstGeom prst="rect">
             <a:avLst/>
@@ -4401,9 +4369,9 @@
           <a:p>
             <a:pPr>
               <a:spcAft>
-                <a:spcPts val="400"/>
+                <a:spcPts val="600"/>
               </a:spcAft>
-              <a:defRPr sz="800">
+              <a:defRPr sz="900">
                 <a:solidFill>
                   <a:srgbClr val="212121"/>
                 </a:solidFill>
@@ -4411,15 +4379,15 @@
               </a:defRPr>
             </a:pPr>
             <a:r>
-              <a:t>• Not all services send logs to CloudWatch Logs</a:t>
+              <a:t>• Not all services send logs to CloudWatch Logs.</a:t>
             </a:r>
           </a:p>
           <a:p>
             <a:pPr>
               <a:spcAft>
-                <a:spcPts val="400"/>
+                <a:spcPts val="600"/>
               </a:spcAft>
-              <a:defRPr sz="800">
+              <a:defRPr sz="900">
                 <a:solidFill>
                   <a:srgbClr val="212121"/>
                 </a:solidFill>
@@ -4427,15 +4395,15 @@
               </a:defRPr>
             </a:pPr>
             <a:r>
-              <a:t>• It is time consuming to examine a large numbers of different log files</a:t>
+              <a:t>• It is time consuming to examine a large numbers of different log files.</a:t>
             </a:r>
           </a:p>
           <a:p>
             <a:pPr>
               <a:spcAft>
-                <a:spcPts val="400"/>
+                <a:spcPts val="600"/>
               </a:spcAft>
-              <a:defRPr sz="800">
+              <a:defRPr sz="900">
                 <a:solidFill>
                   <a:srgbClr val="212121"/>
                 </a:solidFill>
@@ -4443,15 +4411,15 @@
               </a:defRPr>
             </a:pPr>
             <a:r>
-              <a:t>• Log output is application-specific and may not provide any insight into performance issues</a:t>
+              <a:t>• Log output is application-specific and may not provide any insight into performance issues.</a:t>
             </a:r>
           </a:p>
           <a:p>
             <a:pPr>
               <a:spcAft>
-                <a:spcPts val="400"/>
+                <a:spcPts val="600"/>
               </a:spcAft>
-              <a:defRPr sz="800">
+              <a:defRPr sz="900">
                 <a:solidFill>
                   <a:srgbClr val="212121"/>
                 </a:solidFill>
@@ -4459,7 +4427,7 @@
               </a:defRPr>
             </a:pPr>
             <a:r>
-              <a:t>• CloudTrail records API calls, not application-level activity</a:t>
+              <a:t>• CloudTrail records API calls, not application-level activity.</a:t>
             </a:r>
           </a:p>
         </p:txBody>
@@ -4639,7 +4607,7 @@
         <p:spPr>
           <a:xfrm>
             <a:off x="182880" y="914400"/>
-            <a:ext cx="2225976" cy="3840480"/>
+            <a:ext cx="3734875" cy="3840480"/>
           </a:xfrm>
           <a:prstGeom prst="rect">
             <a:avLst/>
@@ -4774,9 +4742,9 @@
           <a:p>
             <a:pPr>
               <a:spcAft>
-                <a:spcPts val="400"/>
+                <a:spcPts val="600"/>
               </a:spcAft>
-              <a:defRPr sz="800">
+              <a:defRPr sz="900">
                 <a:solidFill>
                   <a:srgbClr val="212121"/>
                 </a:solidFill>
@@ -4784,15 +4752,15 @@
               </a:defRPr>
             </a:pPr>
             <a:r>
-              <a:t>• Unlike metrics or logs</a:t>
+              <a:t>• Unlike metrics or logs, X-Ray can help users quickly identify services by their relative response times.</a:t>
             </a:r>
           </a:p>
           <a:p>
             <a:pPr>
               <a:spcAft>
-                <a:spcPts val="400"/>
+                <a:spcPts val="600"/>
               </a:spcAft>
-              <a:defRPr sz="800">
+              <a:defRPr sz="900">
                 <a:solidFill>
                   <a:srgbClr val="212121"/>
                 </a:solidFill>
@@ -4800,15 +4768,15 @@
               </a:defRPr>
             </a:pPr>
             <a:r>
-              <a:t>• X-Ray can help users quickly identify services by their relative response times</a:t>
+              <a:t>• X-Ray can identify a poorly performing service from within a web of interacting services.</a:t>
             </a:r>
           </a:p>
           <a:p>
             <a:pPr>
               <a:spcAft>
-                <a:spcPts val="400"/>
+                <a:spcPts val="600"/>
               </a:spcAft>
-              <a:defRPr sz="800">
+              <a:defRPr sz="900">
                 <a:solidFill>
                   <a:srgbClr val="212121"/>
                 </a:solidFill>
@@ -4816,23 +4784,7 @@
               </a:defRPr>
             </a:pPr>
             <a:r>
-              <a:t>• X-Ray can identify a poorly performing service from within a web of interacting services</a:t>
-            </a:r>
-          </a:p>
-          <a:p>
-            <a:pPr>
-              <a:spcAft>
-                <a:spcPts val="400"/>
-              </a:spcAft>
-              <a:defRPr sz="800">
-                <a:solidFill>
-                  <a:srgbClr val="212121"/>
-                </a:solidFill>
-                <a:latin typeface="Segoe UI"/>
-              </a:defRPr>
-            </a:pPr>
-            <a:r>
-              <a:t>• Once identified, CloudWatch provides the context, including the logs and metrics necessary to study specific issues</a:t>
+              <a:t>• Once identified, CloudWatch provides the context, including the logs and metrics necessary to study specific issues.</a:t>
             </a:r>
           </a:p>
         </p:txBody>
@@ -5011,8 +4963,8 @@
         </p:blipFill>
         <p:spPr>
           <a:xfrm>
-            <a:off x="182880" y="1212111"/>
-            <a:ext cx="5303520" cy="3245056"/>
+            <a:off x="182880" y="1205657"/>
+            <a:ext cx="5303520" cy="3257965"/>
           </a:xfrm>
           <a:prstGeom prst="rect">
             <a:avLst/>
@@ -5147,9 +5099,9 @@
           <a:p>
             <a:pPr>
               <a:spcAft>
-                <a:spcPts val="400"/>
+                <a:spcPts val="600"/>
               </a:spcAft>
-              <a:defRPr sz="800">
+              <a:defRPr sz="900">
                 <a:solidFill>
                   <a:srgbClr val="212121"/>
                 </a:solidFill>
@@ -5157,15 +5109,15 @@
               </a:defRPr>
             </a:pPr>
             <a:r>
-              <a:t>• CloudTrail records API calls</a:t>
+              <a:t>• CloudTrail records API calls.</a:t>
             </a:r>
           </a:p>
           <a:p>
             <a:pPr>
               <a:spcAft>
-                <a:spcPts val="400"/>
+                <a:spcPts val="600"/>
               </a:spcAft>
-              <a:defRPr sz="800">
+              <a:defRPr sz="900">
                 <a:solidFill>
                   <a:srgbClr val="212121"/>
                 </a:solidFill>
@@ -5173,15 +5125,15 @@
               </a:defRPr>
             </a:pPr>
             <a:r>
-              <a:t>• CloudTrail is not an application log aggregator, such as CloudWatch Logs</a:t>
+              <a:t>• CloudTrail is not an application log aggregator, such as CloudWatch Logs.</a:t>
             </a:r>
           </a:p>
           <a:p>
             <a:pPr>
               <a:spcAft>
-                <a:spcPts val="400"/>
+                <a:spcPts val="600"/>
               </a:spcAft>
-              <a:defRPr sz="800">
+              <a:defRPr sz="900">
                 <a:solidFill>
                   <a:srgbClr val="212121"/>
                 </a:solidFill>
@@ -5189,15 +5141,15 @@
               </a:defRPr>
             </a:pPr>
             <a:r>
-              <a:t>• Any API calls that individual services make would be not be likely to affect application performance</a:t>
+              <a:t>• Any API calls that individual services make would be not be likely to affect application performance.</a:t>
             </a:r>
           </a:p>
           <a:p>
             <a:pPr>
               <a:spcAft>
-                <a:spcPts val="400"/>
+                <a:spcPts val="600"/>
               </a:spcAft>
-              <a:defRPr sz="800">
+              <a:defRPr sz="900">
                 <a:solidFill>
                   <a:srgbClr val="212121"/>
                 </a:solidFill>
@@ -5205,15 +5157,15 @@
               </a:defRPr>
             </a:pPr>
             <a:r>
-              <a:t>• Also, X-Ray is mainly used to study a service's interaction time with other services</a:t>
+              <a:t>• Also, X-Ray is mainly used to study a service's interaction time with other services.</a:t>
             </a:r>
           </a:p>
           <a:p>
             <a:pPr>
               <a:spcAft>
-                <a:spcPts val="400"/>
+                <a:spcPts val="600"/>
               </a:spcAft>
-              <a:defRPr sz="800">
+              <a:defRPr sz="900">
                 <a:solidFill>
                   <a:srgbClr val="212121"/>
                 </a:solidFill>
@@ -5221,7 +5173,7 @@
               </a:defRPr>
             </a:pPr>
             <a:r>
-              <a:t>• It has limited utility to diagnose an individual service's performance</a:t>
+              <a:t>• It has limited utility to diagnose an individual service's performance.</a:t>
             </a:r>
           </a:p>
         </p:txBody>
